--- a/chicago_crash_presentation.pptx
+++ b/chicago_crash_presentation.pptx
@@ -2,23 +2,24 @@
 <file path=ppt/presentation.xml><?xml version="1.0" encoding="utf-8"?>
 <p:presentation xmlns:a="http://schemas.openxmlformats.org/drawingml/2006/main" xmlns:r="http://schemas.openxmlformats.org/officeDocument/2006/relationships" xmlns:p="http://schemas.openxmlformats.org/presentationml/2006/main" saveSubsetFonts="1" autoCompressPictures="0">
   <p:sldMasterIdLst>
-    <p:sldMasterId id="2147483672" r:id="rId1"/>
+    <p:sldMasterId id="2147483719" r:id="rId1"/>
   </p:sldMasterIdLst>
   <p:sldIdLst>
     <p:sldId id="256" r:id="rId2"/>
-    <p:sldId id="257" r:id="rId3"/>
-    <p:sldId id="258" r:id="rId4"/>
-    <p:sldId id="259" r:id="rId5"/>
-    <p:sldId id="260" r:id="rId6"/>
-    <p:sldId id="261" r:id="rId7"/>
-    <p:sldId id="262" r:id="rId8"/>
-    <p:sldId id="263" r:id="rId9"/>
-    <p:sldId id="264" r:id="rId10"/>
-    <p:sldId id="266" r:id="rId11"/>
-    <p:sldId id="270" r:id="rId12"/>
-    <p:sldId id="267" r:id="rId13"/>
-    <p:sldId id="268" r:id="rId14"/>
-    <p:sldId id="269" r:id="rId15"/>
+    <p:sldId id="271" r:id="rId3"/>
+    <p:sldId id="257" r:id="rId4"/>
+    <p:sldId id="258" r:id="rId5"/>
+    <p:sldId id="259" r:id="rId6"/>
+    <p:sldId id="260" r:id="rId7"/>
+    <p:sldId id="261" r:id="rId8"/>
+    <p:sldId id="262" r:id="rId9"/>
+    <p:sldId id="263" r:id="rId10"/>
+    <p:sldId id="264" r:id="rId11"/>
+    <p:sldId id="266" r:id="rId12"/>
+    <p:sldId id="270" r:id="rId13"/>
+    <p:sldId id="267" r:id="rId14"/>
+    <p:sldId id="268" r:id="rId15"/>
+    <p:sldId id="269" r:id="rId16"/>
   </p:sldIdLst>
   <p:sldSz cx="9144000" cy="6858000" type="screen4x3"/>
   <p:notesSz cx="6858000" cy="9144000"/>
@@ -981,7 +982,7 @@
     </p:spTree>
     <p:extLst>
       <p:ext uri="{BB962C8B-B14F-4D97-AF65-F5344CB8AC3E}">
-        <p14:creationId xmlns:p14="http://schemas.microsoft.com/office/powerpoint/2010/main" val="33843016"/>
+        <p14:creationId xmlns:p14="http://schemas.microsoft.com/office/powerpoint/2010/main" val="1988375695"/>
       </p:ext>
     </p:extLst>
   </p:cSld>
@@ -1232,7 +1233,7 @@
     </p:spTree>
     <p:extLst>
       <p:ext uri="{BB962C8B-B14F-4D97-AF65-F5344CB8AC3E}">
-        <p14:creationId xmlns:p14="http://schemas.microsoft.com/office/powerpoint/2010/main" val="2212036319"/>
+        <p14:creationId xmlns:p14="http://schemas.microsoft.com/office/powerpoint/2010/main" val="2961934048"/>
       </p:ext>
     </p:extLst>
   </p:cSld>
@@ -1628,7 +1629,7 @@
     </p:spTree>
     <p:extLst>
       <p:ext uri="{BB962C8B-B14F-4D97-AF65-F5344CB8AC3E}">
-        <p14:creationId xmlns:p14="http://schemas.microsoft.com/office/powerpoint/2010/main" val="2356220809"/>
+        <p14:creationId xmlns:p14="http://schemas.microsoft.com/office/powerpoint/2010/main" val="403957332"/>
       </p:ext>
     </p:extLst>
   </p:cSld>
@@ -1879,7 +1880,7 @@
     </p:spTree>
     <p:extLst>
       <p:ext uri="{BB962C8B-B14F-4D97-AF65-F5344CB8AC3E}">
-        <p14:creationId xmlns:p14="http://schemas.microsoft.com/office/powerpoint/2010/main" val="4053145971"/>
+        <p14:creationId xmlns:p14="http://schemas.microsoft.com/office/powerpoint/2010/main" val="2024382711"/>
       </p:ext>
     </p:extLst>
   </p:cSld>
@@ -2275,7 +2276,7 @@
     </p:spTree>
     <p:extLst>
       <p:ext uri="{BB962C8B-B14F-4D97-AF65-F5344CB8AC3E}">
-        <p14:creationId xmlns:p14="http://schemas.microsoft.com/office/powerpoint/2010/main" val="902565062"/>
+        <p14:creationId xmlns:p14="http://schemas.microsoft.com/office/powerpoint/2010/main" val="551036550"/>
       </p:ext>
     </p:extLst>
   </p:cSld>
@@ -2586,7 +2587,7 @@
     </p:spTree>
     <p:extLst>
       <p:ext uri="{BB962C8B-B14F-4D97-AF65-F5344CB8AC3E}">
-        <p14:creationId xmlns:p14="http://schemas.microsoft.com/office/powerpoint/2010/main" val="3988309356"/>
+        <p14:creationId xmlns:p14="http://schemas.microsoft.com/office/powerpoint/2010/main" val="937958145"/>
       </p:ext>
     </p:extLst>
   </p:cSld>
@@ -2756,7 +2757,7 @@
     </p:spTree>
     <p:extLst>
       <p:ext uri="{BB962C8B-B14F-4D97-AF65-F5344CB8AC3E}">
-        <p14:creationId xmlns:p14="http://schemas.microsoft.com/office/powerpoint/2010/main" val="1500712633"/>
+        <p14:creationId xmlns:p14="http://schemas.microsoft.com/office/powerpoint/2010/main" val="3445798355"/>
       </p:ext>
     </p:extLst>
   </p:cSld>
@@ -2936,7 +2937,7 @@
     </p:spTree>
     <p:extLst>
       <p:ext uri="{BB962C8B-B14F-4D97-AF65-F5344CB8AC3E}">
-        <p14:creationId xmlns:p14="http://schemas.microsoft.com/office/powerpoint/2010/main" val="641905290"/>
+        <p14:creationId xmlns:p14="http://schemas.microsoft.com/office/powerpoint/2010/main" val="2054513885"/>
       </p:ext>
     </p:extLst>
   </p:cSld>
@@ -3106,7 +3107,7 @@
     </p:spTree>
     <p:extLst>
       <p:ext uri="{BB962C8B-B14F-4D97-AF65-F5344CB8AC3E}">
-        <p14:creationId xmlns:p14="http://schemas.microsoft.com/office/powerpoint/2010/main" val="1623476247"/>
+        <p14:creationId xmlns:p14="http://schemas.microsoft.com/office/powerpoint/2010/main" val="2580031172"/>
       </p:ext>
     </p:extLst>
   </p:cSld>
@@ -3353,7 +3354,7 @@
     </p:spTree>
     <p:extLst>
       <p:ext uri="{BB962C8B-B14F-4D97-AF65-F5344CB8AC3E}">
-        <p14:creationId xmlns:p14="http://schemas.microsoft.com/office/powerpoint/2010/main" val="240667705"/>
+        <p14:creationId xmlns:p14="http://schemas.microsoft.com/office/powerpoint/2010/main" val="3577512612"/>
       </p:ext>
     </p:extLst>
   </p:cSld>
@@ -3650,7 +3651,7 @@
     </p:spTree>
     <p:extLst>
       <p:ext uri="{BB962C8B-B14F-4D97-AF65-F5344CB8AC3E}">
-        <p14:creationId xmlns:p14="http://schemas.microsoft.com/office/powerpoint/2010/main" val="4157322671"/>
+        <p14:creationId xmlns:p14="http://schemas.microsoft.com/office/powerpoint/2010/main" val="3833953957"/>
       </p:ext>
     </p:extLst>
   </p:cSld>
@@ -4029,7 +4030,7 @@
     </p:spTree>
     <p:extLst>
       <p:ext uri="{BB962C8B-B14F-4D97-AF65-F5344CB8AC3E}">
-        <p14:creationId xmlns:p14="http://schemas.microsoft.com/office/powerpoint/2010/main" val="803205121"/>
+        <p14:creationId xmlns:p14="http://schemas.microsoft.com/office/powerpoint/2010/main" val="1534527071"/>
       </p:ext>
     </p:extLst>
   </p:cSld>
@@ -4152,7 +4153,7 @@
     </p:spTree>
     <p:extLst>
       <p:ext uri="{BB962C8B-B14F-4D97-AF65-F5344CB8AC3E}">
-        <p14:creationId xmlns:p14="http://schemas.microsoft.com/office/powerpoint/2010/main" val="4006643887"/>
+        <p14:creationId xmlns:p14="http://schemas.microsoft.com/office/powerpoint/2010/main" val="2022460841"/>
       </p:ext>
     </p:extLst>
   </p:cSld>
@@ -4247,7 +4248,7 @@
     </p:spTree>
     <p:extLst>
       <p:ext uri="{BB962C8B-B14F-4D97-AF65-F5344CB8AC3E}">
-        <p14:creationId xmlns:p14="http://schemas.microsoft.com/office/powerpoint/2010/main" val="3356413470"/>
+        <p14:creationId xmlns:p14="http://schemas.microsoft.com/office/powerpoint/2010/main" val="2381084603"/>
       </p:ext>
     </p:extLst>
   </p:cSld>
@@ -4502,7 +4503,7 @@
     </p:spTree>
     <p:extLst>
       <p:ext uri="{BB962C8B-B14F-4D97-AF65-F5344CB8AC3E}">
-        <p14:creationId xmlns:p14="http://schemas.microsoft.com/office/powerpoint/2010/main" val="2955337460"/>
+        <p14:creationId xmlns:p14="http://schemas.microsoft.com/office/powerpoint/2010/main" val="428331515"/>
       </p:ext>
     </p:extLst>
   </p:cSld>
@@ -4765,7 +4766,7 @@
     </p:spTree>
     <p:extLst>
       <p:ext uri="{BB962C8B-B14F-4D97-AF65-F5344CB8AC3E}">
-        <p14:creationId xmlns:p14="http://schemas.microsoft.com/office/powerpoint/2010/main" val="3689544636"/>
+        <p14:creationId xmlns:p14="http://schemas.microsoft.com/office/powerpoint/2010/main" val="4283488207"/>
       </p:ext>
     </p:extLst>
   </p:cSld>
@@ -5613,28 +5614,28 @@
     </p:spTree>
     <p:extLst>
       <p:ext uri="{BB962C8B-B14F-4D97-AF65-F5344CB8AC3E}">
-        <p14:creationId xmlns:p14="http://schemas.microsoft.com/office/powerpoint/2010/main" val="2673322405"/>
+        <p14:creationId xmlns:p14="http://schemas.microsoft.com/office/powerpoint/2010/main" val="140634750"/>
       </p:ext>
     </p:extLst>
   </p:cSld>
   <p:clrMap bg1="lt1" tx1="dk1" bg2="lt2" tx2="dk2" accent1="accent1" accent2="accent2" accent3="accent3" accent4="accent4" accent5="accent5" accent6="accent6" hlink="hlink" folHlink="folHlink"/>
   <p:sldLayoutIdLst>
-    <p:sldLayoutId id="2147483673" r:id="rId1"/>
-    <p:sldLayoutId id="2147483674" r:id="rId2"/>
-    <p:sldLayoutId id="2147483675" r:id="rId3"/>
-    <p:sldLayoutId id="2147483676" r:id="rId4"/>
-    <p:sldLayoutId id="2147483677" r:id="rId5"/>
-    <p:sldLayoutId id="2147483678" r:id="rId6"/>
-    <p:sldLayoutId id="2147483679" r:id="rId7"/>
-    <p:sldLayoutId id="2147483680" r:id="rId8"/>
-    <p:sldLayoutId id="2147483681" r:id="rId9"/>
-    <p:sldLayoutId id="2147483682" r:id="rId10"/>
-    <p:sldLayoutId id="2147483683" r:id="rId11"/>
-    <p:sldLayoutId id="2147483684" r:id="rId12"/>
-    <p:sldLayoutId id="2147483685" r:id="rId13"/>
-    <p:sldLayoutId id="2147483686" r:id="rId14"/>
-    <p:sldLayoutId id="2147483687" r:id="rId15"/>
-    <p:sldLayoutId id="2147483688" r:id="rId16"/>
+    <p:sldLayoutId id="2147483720" r:id="rId1"/>
+    <p:sldLayoutId id="2147483721" r:id="rId2"/>
+    <p:sldLayoutId id="2147483722" r:id="rId3"/>
+    <p:sldLayoutId id="2147483723" r:id="rId4"/>
+    <p:sldLayoutId id="2147483724" r:id="rId5"/>
+    <p:sldLayoutId id="2147483725" r:id="rId6"/>
+    <p:sldLayoutId id="2147483726" r:id="rId7"/>
+    <p:sldLayoutId id="2147483727" r:id="rId8"/>
+    <p:sldLayoutId id="2147483728" r:id="rId9"/>
+    <p:sldLayoutId id="2147483729" r:id="rId10"/>
+    <p:sldLayoutId id="2147483730" r:id="rId11"/>
+    <p:sldLayoutId id="2147483731" r:id="rId12"/>
+    <p:sldLayoutId id="2147483732" r:id="rId13"/>
+    <p:sldLayoutId id="2147483733" r:id="rId14"/>
+    <p:sldLayoutId id="2147483734" r:id="rId15"/>
+    <p:sldLayoutId id="2147483735" r:id="rId16"/>
   </p:sldLayoutIdLst>
   <p:txStyles>
     <p:titleStyle>
@@ -6068,6 +6069,10 @@
           <a:lstStyle/>
           <a:p>
             <a:r>
+              <a:rPr b="1" dirty="0">
+                <a:latin typeface="Times New Roman" panose="02020603050405020304" pitchFamily="18" charset="0"/>
+                <a:cs typeface="Times New Roman" panose="02020603050405020304" pitchFamily="18" charset="0"/>
+              </a:rPr>
               <a:t>Chicago Car Crash Prediction</a:t>
             </a:r>
           </a:p>
@@ -6089,11 +6094,19 @@
           <a:lstStyle/>
           <a:p>
             <a:r>
+              <a:rPr b="1" dirty="0">
+                <a:latin typeface="Times New Roman" panose="02020603050405020304" pitchFamily="18" charset="0"/>
+                <a:cs typeface="Times New Roman" panose="02020603050405020304" pitchFamily="18" charset="0"/>
+              </a:rPr>
               <a:t>Predicting injury outcomes using machine learning</a:t>
             </a:r>
           </a:p>
           <a:p>
             <a:r>
+              <a:rPr b="1" dirty="0">
+                <a:latin typeface="Times New Roman" panose="02020603050405020304" pitchFamily="18" charset="0"/>
+                <a:cs typeface="Times New Roman" panose="02020603050405020304" pitchFamily="18" charset="0"/>
+              </a:rPr>
               <a:t>Dataset: Chicago crashes (2019–2022)</a:t>
             </a:r>
           </a:p>
@@ -6140,7 +6153,11 @@
           <a:lstStyle/>
           <a:p>
             <a:r>
-              <a:t>Key Insights</a:t>
+              <a:rPr b="1" dirty="0">
+                <a:latin typeface="Times New Roman" panose="02020603050405020304" pitchFamily="18" charset="0"/>
+                <a:cs typeface="Times New Roman" panose="02020603050405020304" pitchFamily="18" charset="0"/>
+              </a:rPr>
+              <a:t>Evaluation Metrics</a:t>
             </a:r>
           </a:p>
         </p:txBody>
@@ -6157,54 +6174,67 @@
         </p:nvSpPr>
         <p:spPr/>
         <p:txBody>
-          <a:bodyPr>
-            <a:normAutofit/>
-          </a:bodyPr>
-          <a:lstStyle/>
-          <a:p>
-            <a:r>
-              <a:rPr lang="en-US" dirty="0"/>
-              <a:t>The analysis helps identify:</a:t>
-            </a:r>
-          </a:p>
-          <a:p>
-            <a:pPr>
-              <a:buFont typeface="Arial" panose="020B0604020202020204" pitchFamily="34" charset="0"/>
-              <a:buChar char="•"/>
+          <a:bodyPr/>
+          <a:lstStyle/>
+          <a:p>
+            <a:r>
+              <a:rPr b="1" dirty="0">
+                <a:latin typeface="Times New Roman" panose="02020603050405020304" pitchFamily="18" charset="0"/>
+                <a:cs typeface="Times New Roman" panose="02020603050405020304" pitchFamily="18" charset="0"/>
+              </a:rPr>
+              <a:t>Accuracy</a:t>
+            </a:r>
+          </a:p>
+          <a:p>
+            <a:r>
+              <a:rPr b="1" dirty="0">
+                <a:latin typeface="Times New Roman" panose="02020603050405020304" pitchFamily="18" charset="0"/>
+                <a:cs typeface="Times New Roman" panose="02020603050405020304" pitchFamily="18" charset="0"/>
+              </a:rPr>
+              <a:t>Confusion Matrix</a:t>
+            </a:r>
+          </a:p>
+          <a:p>
+            <a:r>
+              <a:rPr b="1" dirty="0">
+                <a:latin typeface="Times New Roman" panose="02020603050405020304" pitchFamily="18" charset="0"/>
+                <a:cs typeface="Times New Roman" panose="02020603050405020304" pitchFamily="18" charset="0"/>
+              </a:rPr>
+              <a:t>ROC-AUC</a:t>
+            </a:r>
+          </a:p>
+          <a:p>
+            <a:r>
+              <a:rPr b="1" dirty="0">
+                <a:latin typeface="Times New Roman" panose="02020603050405020304" pitchFamily="18" charset="0"/>
+                <a:cs typeface="Times New Roman" panose="02020603050405020304" pitchFamily="18" charset="0"/>
+              </a:rPr>
+              <a:t>Classification Report</a:t>
+            </a:r>
+            <a:endParaRPr lang="en-US" b="1" dirty="0">
+              <a:latin typeface="Times New Roman" panose="02020603050405020304" pitchFamily="18" charset="0"/>
+              <a:cs typeface="Times New Roman" panose="02020603050405020304" pitchFamily="18" charset="0"/>
+            </a:endParaRPr>
+          </a:p>
+          <a:p>
+            <a:endParaRPr lang="en-US" b="1" dirty="0">
+              <a:latin typeface="Times New Roman" panose="02020603050405020304" pitchFamily="18" charset="0"/>
+              <a:cs typeface="Times New Roman" panose="02020603050405020304" pitchFamily="18" charset="0"/>
+            </a:endParaRPr>
+          </a:p>
+          <a:p>
+            <a:r>
+              <a:rPr lang="en-US" b="1" dirty="0">
+                <a:latin typeface="Times New Roman" panose="02020603050405020304" pitchFamily="18" charset="0"/>
+                <a:cs typeface="Times New Roman" panose="02020603050405020304" pitchFamily="18" charset="0"/>
+              </a:rPr>
+              <a:t>These metrics help measure how well the models predict injury outcomes.</a:t>
+            </a:r>
+          </a:p>
+          <a:p>
+            <a:pPr marL="0" indent="0">
+              <a:buNone/>
             </a:pPr>
-            <a:r>
-              <a:rPr lang="en-US" dirty="0"/>
-              <a:t>Environmental conditions associated with higher injury risk</a:t>
-            </a:r>
-          </a:p>
-          <a:p>
-            <a:pPr>
-              <a:buFont typeface="Arial" panose="020B0604020202020204" pitchFamily="34" charset="0"/>
-              <a:buChar char="•"/>
-            </a:pPr>
-            <a:r>
-              <a:rPr lang="en-US" dirty="0"/>
-              <a:t>Crash patterns linked to severe accidents</a:t>
-            </a:r>
-          </a:p>
-          <a:p>
-            <a:pPr>
-              <a:buFont typeface="Arial" panose="020B0604020202020204" pitchFamily="34" charset="0"/>
-              <a:buChar char="•"/>
-            </a:pPr>
-            <a:r>
-              <a:rPr lang="en-US" dirty="0"/>
-              <a:t>Predictive indicators of injury-causing crashes</a:t>
-            </a:r>
-          </a:p>
-          <a:p>
-            <a:r>
-              <a:rPr lang="en-US" dirty="0"/>
-              <a:t>These insights can help authorities implement preventative measures to improve road safety.</a:t>
-            </a:r>
-            <a:br>
-              <a:rPr lang="en-US" dirty="0"/>
-            </a:br>
             <a:endParaRPr lang="en-US" dirty="0"/>
           </a:p>
         </p:txBody>
@@ -6236,6 +6266,139 @@
       </p:grpSpPr>
       <p:sp>
         <p:nvSpPr>
+          <p:cNvPr id="2" name="Title 1"/>
+          <p:cNvSpPr>
+            <a:spLocks noGrp="1"/>
+          </p:cNvSpPr>
+          <p:nvPr>
+            <p:ph type="title"/>
+          </p:nvPr>
+        </p:nvSpPr>
+        <p:spPr/>
+        <p:txBody>
+          <a:bodyPr/>
+          <a:lstStyle/>
+          <a:p>
+            <a:r>
+              <a:rPr b="1" dirty="0">
+                <a:latin typeface="Times New Roman" panose="02020603050405020304" pitchFamily="18" charset="0"/>
+                <a:cs typeface="Times New Roman" panose="02020603050405020304" pitchFamily="18" charset="0"/>
+              </a:rPr>
+              <a:t>Key Insights</a:t>
+            </a:r>
+          </a:p>
+        </p:txBody>
+      </p:sp>
+      <p:sp>
+        <p:nvSpPr>
+          <p:cNvPr id="3" name="Content Placeholder 2"/>
+          <p:cNvSpPr>
+            <a:spLocks noGrp="1"/>
+          </p:cNvSpPr>
+          <p:nvPr>
+            <p:ph idx="1"/>
+          </p:nvPr>
+        </p:nvSpPr>
+        <p:spPr/>
+        <p:txBody>
+          <a:bodyPr>
+            <a:normAutofit/>
+          </a:bodyPr>
+          <a:lstStyle/>
+          <a:p>
+            <a:r>
+              <a:rPr lang="en-US" b="1" dirty="0">
+                <a:latin typeface="Times New Roman" panose="02020603050405020304" pitchFamily="18" charset="0"/>
+                <a:cs typeface="Times New Roman" panose="02020603050405020304" pitchFamily="18" charset="0"/>
+              </a:rPr>
+              <a:t>The analysis helps identify:</a:t>
+            </a:r>
+          </a:p>
+          <a:p>
+            <a:pPr>
+              <a:buFont typeface="Arial" panose="020B0604020202020204" pitchFamily="34" charset="0"/>
+              <a:buChar char="•"/>
+            </a:pPr>
+            <a:r>
+              <a:rPr lang="en-US" b="1" dirty="0">
+                <a:latin typeface="Times New Roman" panose="02020603050405020304" pitchFamily="18" charset="0"/>
+                <a:cs typeface="Times New Roman" panose="02020603050405020304" pitchFamily="18" charset="0"/>
+              </a:rPr>
+              <a:t>Environmental conditions associated with higher injury risk</a:t>
+            </a:r>
+          </a:p>
+          <a:p>
+            <a:pPr>
+              <a:buFont typeface="Arial" panose="020B0604020202020204" pitchFamily="34" charset="0"/>
+              <a:buChar char="•"/>
+            </a:pPr>
+            <a:r>
+              <a:rPr lang="en-US" b="1" dirty="0">
+                <a:latin typeface="Times New Roman" panose="02020603050405020304" pitchFamily="18" charset="0"/>
+                <a:cs typeface="Times New Roman" panose="02020603050405020304" pitchFamily="18" charset="0"/>
+              </a:rPr>
+              <a:t>Crash patterns linked to severe accidents</a:t>
+            </a:r>
+          </a:p>
+          <a:p>
+            <a:pPr>
+              <a:buFont typeface="Arial" panose="020B0604020202020204" pitchFamily="34" charset="0"/>
+              <a:buChar char="•"/>
+            </a:pPr>
+            <a:r>
+              <a:rPr lang="en-US" b="1" dirty="0">
+                <a:latin typeface="Times New Roman" panose="02020603050405020304" pitchFamily="18" charset="0"/>
+                <a:cs typeface="Times New Roman" panose="02020603050405020304" pitchFamily="18" charset="0"/>
+              </a:rPr>
+              <a:t>Predictive indicators of injury-causing crashes</a:t>
+            </a:r>
+          </a:p>
+          <a:p>
+            <a:r>
+              <a:rPr lang="en-US" b="1" dirty="0">
+                <a:latin typeface="Times New Roman" panose="02020603050405020304" pitchFamily="18" charset="0"/>
+                <a:cs typeface="Times New Roman" panose="02020603050405020304" pitchFamily="18" charset="0"/>
+              </a:rPr>
+              <a:t>These insights can help authorities implement preventative measures to improve road safety</a:t>
+            </a:r>
+            <a:r>
+              <a:rPr lang="en-US" b="1" dirty="0"/>
+              <a:t>.</a:t>
+            </a:r>
+            <a:br>
+              <a:rPr lang="en-US" dirty="0"/>
+            </a:br>
+            <a:endParaRPr lang="en-US" dirty="0"/>
+          </a:p>
+        </p:txBody>
+      </p:sp>
+    </p:spTree>
+  </p:cSld>
+  <p:clrMapOvr>
+    <a:masterClrMapping/>
+  </p:clrMapOvr>
+</p:sld>
+</file>
+
+<file path=ppt/slides/slide12.xml><?xml version="1.0" encoding="utf-8"?>
+<p:sld xmlns:a="http://schemas.openxmlformats.org/drawingml/2006/main" xmlns:r="http://schemas.openxmlformats.org/officeDocument/2006/relationships" xmlns:p="http://schemas.openxmlformats.org/presentationml/2006/main">
+  <p:cSld>
+    <p:spTree>
+      <p:nvGrpSpPr>
+        <p:cNvPr id="1" name=""/>
+        <p:cNvGrpSpPr/>
+        <p:nvPr/>
+      </p:nvGrpSpPr>
+      <p:grpSpPr>
+        <a:xfrm>
+          <a:off x="0" y="0"/>
+          <a:ext cx="0" cy="0"/>
+          <a:chOff x="0" y="0"/>
+          <a:chExt cx="0" cy="0"/>
+        </a:xfrm>
+      </p:grpSpPr>
+      <p:sp>
+        <p:nvSpPr>
           <p:cNvPr id="2" name="Title 1">
             <a:extLst>
               <a:ext uri="{FF2B5EF4-FFF2-40B4-BE49-F238E27FC236}">
@@ -6256,10 +6419,16 @@
           <a:lstStyle/>
           <a:p>
             <a:r>
-              <a:rPr lang="en-US" dirty="0"/>
+              <a:rPr lang="en-US" b="1" dirty="0">
+                <a:latin typeface="Times New Roman" panose="02020603050405020304" pitchFamily="18" charset="0"/>
+                <a:cs typeface="Times New Roman" panose="02020603050405020304" pitchFamily="18" charset="0"/>
+              </a:rPr>
               <a:t>Top predictors plot</a:t>
             </a:r>
-            <a:endParaRPr lang="en-KE" dirty="0"/>
+            <a:endParaRPr lang="en-KE" b="1" dirty="0">
+              <a:latin typeface="Times New Roman" panose="02020603050405020304" pitchFamily="18" charset="0"/>
+              <a:cs typeface="Times New Roman" panose="02020603050405020304" pitchFamily="18" charset="0"/>
+            </a:endParaRPr>
           </a:p>
         </p:txBody>
       </p:sp>
@@ -6308,140 +6477,6 @@
 </p:sld>
 </file>
 
-<file path=ppt/slides/slide12.xml><?xml version="1.0" encoding="utf-8"?>
-<p:sld xmlns:a="http://schemas.openxmlformats.org/drawingml/2006/main" xmlns:r="http://schemas.openxmlformats.org/officeDocument/2006/relationships" xmlns:p="http://schemas.openxmlformats.org/presentationml/2006/main">
-  <p:cSld>
-    <p:spTree>
-      <p:nvGrpSpPr>
-        <p:cNvPr id="1" name=""/>
-        <p:cNvGrpSpPr/>
-        <p:nvPr/>
-      </p:nvGrpSpPr>
-      <p:grpSpPr>
-        <a:xfrm>
-          <a:off x="0" y="0"/>
-          <a:ext cx="0" cy="0"/>
-          <a:chOff x="0" y="0"/>
-          <a:chExt cx="0" cy="0"/>
-        </a:xfrm>
-      </p:grpSpPr>
-      <p:sp>
-        <p:nvSpPr>
-          <p:cNvPr id="2" name="Title 1"/>
-          <p:cNvSpPr>
-            <a:spLocks noGrp="1"/>
-          </p:cNvSpPr>
-          <p:nvPr>
-            <p:ph type="title"/>
-          </p:nvPr>
-        </p:nvSpPr>
-        <p:spPr/>
-        <p:txBody>
-          <a:bodyPr/>
-          <a:lstStyle/>
-          <a:p>
-            <a:r>
-              <a:t>Recommendations</a:t>
-            </a:r>
-          </a:p>
-        </p:txBody>
-      </p:sp>
-      <p:sp>
-        <p:nvSpPr>
-          <p:cNvPr id="3" name="Content Placeholder 2"/>
-          <p:cNvSpPr>
-            <a:spLocks noGrp="1"/>
-          </p:cNvSpPr>
-          <p:nvPr>
-            <p:ph idx="1"/>
-          </p:nvPr>
-        </p:nvSpPr>
-        <p:spPr>
-          <a:xfrm>
-            <a:off x="716691" y="1930400"/>
-            <a:ext cx="6347714" cy="3880773"/>
-          </a:xfrm>
-        </p:spPr>
-        <p:txBody>
-          <a:bodyPr>
-            <a:normAutofit fontScale="85000" lnSpcReduction="10000"/>
-          </a:bodyPr>
-          <a:lstStyle/>
-          <a:p>
-            <a:r>
-              <a:rPr lang="en-US" dirty="0"/>
-              <a:t>1. Since </a:t>
-            </a:r>
-            <a:r>
-              <a:rPr lang="en-US" dirty="0" err="1"/>
-              <a:t>num_vehicles_in_crash</a:t>
-            </a:r>
-            <a:r>
-              <a:rPr lang="en-US" dirty="0"/>
-              <a:t> is your strongest predictor, the city should prioritize on conflict point reduction. By converting high crash intersections into  round abouts or adding more signals. This will slow the speed of the cars and drivers will have ample time for reaction as well as reduce the number of injuries</a:t>
-            </a:r>
-          </a:p>
-          <a:p>
-            <a:r>
-              <a:rPr lang="en-US" dirty="0"/>
-              <a:t>.2. For location safety, because </a:t>
-            </a:r>
-            <a:r>
-              <a:rPr lang="en-US" dirty="0" err="1"/>
-              <a:t>lattitude</a:t>
-            </a:r>
-            <a:r>
-              <a:rPr lang="en-US" dirty="0"/>
-              <a:t> is a significant, the city should investigate the specific streets within the high risk </a:t>
-            </a:r>
-            <a:r>
-              <a:rPr lang="en-US" dirty="0" err="1"/>
-              <a:t>lattitude</a:t>
-            </a:r>
-            <a:r>
-              <a:rPr lang="en-US" dirty="0"/>
-              <a:t> zones. Then enforce speed cameras or increased patrols officers.</a:t>
-            </a:r>
-          </a:p>
-          <a:p>
-            <a:r>
-              <a:rPr lang="en-US" dirty="0"/>
-              <a:t>3. The city should issue amber alerts when there are changes in weather conditions, because different drivers react differently as well as focus on </a:t>
-            </a:r>
-            <a:r>
-              <a:rPr lang="en-US" dirty="0" err="1"/>
-              <a:t>infustructure</a:t>
-            </a:r>
-            <a:r>
-              <a:rPr lang="en-US" dirty="0"/>
-              <a:t> </a:t>
-            </a:r>
-            <a:r>
-              <a:rPr lang="en-US" dirty="0" err="1"/>
-              <a:t>diring</a:t>
-            </a:r>
-            <a:r>
-              <a:rPr lang="en-US" dirty="0"/>
-              <a:t> these weather changes</a:t>
-            </a:r>
-          </a:p>
-          <a:p>
-            <a:r>
-              <a:rPr lang="en-US" dirty="0"/>
-              <a:t>4. The city should integrate an emergency dispatch system. This is because we a 69% recall, which flags when a crash is likely to have an injury. </a:t>
-            </a:r>
-            <a:endParaRPr dirty="0"/>
-          </a:p>
-        </p:txBody>
-      </p:sp>
-    </p:spTree>
-  </p:cSld>
-  <p:clrMapOvr>
-    <a:masterClrMapping/>
-  </p:clrMapOvr>
-</p:sld>
-</file>
-
 <file path=ppt/slides/slide13.xml><?xml version="1.0" encoding="utf-8"?>
 <p:sld xmlns:a="http://schemas.openxmlformats.org/drawingml/2006/main" xmlns:r="http://schemas.openxmlformats.org/officeDocument/2006/relationships" xmlns:p="http://schemas.openxmlformats.org/presentationml/2006/main">
   <p:cSld>
@@ -6475,7 +6510,11 @@
           <a:lstStyle/>
           <a:p>
             <a:r>
-              <a:t>Conclusion</a:t>
+              <a:rPr b="1" dirty="0">
+                <a:latin typeface="Times New Roman" panose="02020603050405020304" pitchFamily="18" charset="0"/>
+                <a:cs typeface="Times New Roman" panose="02020603050405020304" pitchFamily="18" charset="0"/>
+              </a:rPr>
+              <a:t>Recommendations</a:t>
             </a:r>
           </a:p>
         </p:txBody>
@@ -6490,24 +6529,127 @@
             <p:ph idx="1"/>
           </p:nvPr>
         </p:nvSpPr>
-        <p:spPr/>
-        <p:txBody>
-          <a:bodyPr/>
-          <a:lstStyle/>
-          <a:p>
-            <a:r>
-              <a:rPr lang="en-US" dirty="0"/>
-              <a:t>While a standard model prioritizes on accuracy, we optimized for recall. The model reveals that the more the cars at in intersections the higher the impact of accidents. The city should focus on multi vehicle intersections within the high risk </a:t>
-            </a:r>
-            <a:r>
-              <a:rPr lang="en-US" dirty="0" err="1"/>
+        <p:spPr>
+          <a:xfrm>
+            <a:off x="716691" y="1930400"/>
+            <a:ext cx="6347714" cy="3880773"/>
+          </a:xfrm>
+        </p:spPr>
+        <p:txBody>
+          <a:bodyPr>
+            <a:normAutofit fontScale="85000" lnSpcReduction="10000"/>
+          </a:bodyPr>
+          <a:lstStyle/>
+          <a:p>
+            <a:r>
+              <a:rPr lang="en-US" sz="1900" b="1" dirty="0">
+                <a:latin typeface="Times New Roman" panose="02020603050405020304" pitchFamily="18" charset="0"/>
+                <a:cs typeface="Times New Roman" panose="02020603050405020304" pitchFamily="18" charset="0"/>
+              </a:rPr>
+              <a:t>1. Since </a:t>
+            </a:r>
+            <a:r>
+              <a:rPr lang="en-US" sz="1900" b="1" dirty="0" err="1">
+                <a:latin typeface="Times New Roman" panose="02020603050405020304" pitchFamily="18" charset="0"/>
+                <a:cs typeface="Times New Roman" panose="02020603050405020304" pitchFamily="18" charset="0"/>
+              </a:rPr>
+              <a:t>num_vehicles_in_crash</a:t>
+            </a:r>
+            <a:r>
+              <a:rPr lang="en-US" sz="1900" b="1" dirty="0">
+                <a:latin typeface="Times New Roman" panose="02020603050405020304" pitchFamily="18" charset="0"/>
+                <a:cs typeface="Times New Roman" panose="02020603050405020304" pitchFamily="18" charset="0"/>
+              </a:rPr>
+              <a:t> is your strongest predictor, the city should prioritize on conflict point reduction. By converting high crash intersections into  round abouts or adding more signals. This will slow the speed of the cars and drivers will have ample time for reaction as well as reduce the number of injuries</a:t>
+            </a:r>
+          </a:p>
+          <a:p>
+            <a:r>
+              <a:rPr lang="en-US" sz="1900" b="1" dirty="0">
+                <a:latin typeface="Times New Roman" panose="02020603050405020304" pitchFamily="18" charset="0"/>
+                <a:cs typeface="Times New Roman" panose="02020603050405020304" pitchFamily="18" charset="0"/>
+              </a:rPr>
+              <a:t>2. For location safety, because </a:t>
+            </a:r>
+            <a:r>
+              <a:rPr lang="en-US" sz="1900" b="1" dirty="0" err="1">
+                <a:latin typeface="Times New Roman" panose="02020603050405020304" pitchFamily="18" charset="0"/>
+                <a:cs typeface="Times New Roman" panose="02020603050405020304" pitchFamily="18" charset="0"/>
+              </a:rPr>
               <a:t>lattitude</a:t>
             </a:r>
             <a:r>
-              <a:rPr lang="en-US" dirty="0"/>
-              <a:t> and the allocate resources where they will have immediate impact on saving lives</a:t>
-            </a:r>
-            <a:endParaRPr dirty="0"/>
+              <a:rPr lang="en-US" sz="1900" b="1" dirty="0">
+                <a:latin typeface="Times New Roman" panose="02020603050405020304" pitchFamily="18" charset="0"/>
+                <a:cs typeface="Times New Roman" panose="02020603050405020304" pitchFamily="18" charset="0"/>
+              </a:rPr>
+              <a:t> is a significant, the city should investigate the specific streets within the high risk </a:t>
+            </a:r>
+            <a:r>
+              <a:rPr lang="en-US" sz="1900" b="1" dirty="0" err="1">
+                <a:latin typeface="Times New Roman" panose="02020603050405020304" pitchFamily="18" charset="0"/>
+                <a:cs typeface="Times New Roman" panose="02020603050405020304" pitchFamily="18" charset="0"/>
+              </a:rPr>
+              <a:t>lattitude</a:t>
+            </a:r>
+            <a:r>
+              <a:rPr lang="en-US" sz="1900" b="1" dirty="0">
+                <a:latin typeface="Times New Roman" panose="02020603050405020304" pitchFamily="18" charset="0"/>
+                <a:cs typeface="Times New Roman" panose="02020603050405020304" pitchFamily="18" charset="0"/>
+              </a:rPr>
+              <a:t> zones. Then enforce speed cameras or increased patrols officers.</a:t>
+            </a:r>
+          </a:p>
+          <a:p>
+            <a:r>
+              <a:rPr lang="en-US" sz="1900" b="1" dirty="0">
+                <a:latin typeface="Times New Roman" panose="02020603050405020304" pitchFamily="18" charset="0"/>
+                <a:cs typeface="Times New Roman" panose="02020603050405020304" pitchFamily="18" charset="0"/>
+              </a:rPr>
+              <a:t>3. The city should issue amber alerts when there are changes in weather conditions, because different drivers react differently as well as focus on </a:t>
+            </a:r>
+            <a:r>
+              <a:rPr lang="en-US" sz="1900" b="1" dirty="0" err="1">
+                <a:latin typeface="Times New Roman" panose="02020603050405020304" pitchFamily="18" charset="0"/>
+                <a:cs typeface="Times New Roman" panose="02020603050405020304" pitchFamily="18" charset="0"/>
+              </a:rPr>
+              <a:t>infustructure</a:t>
+            </a:r>
+            <a:r>
+              <a:rPr lang="en-US" sz="1900" b="1" dirty="0">
+                <a:latin typeface="Times New Roman" panose="02020603050405020304" pitchFamily="18" charset="0"/>
+                <a:cs typeface="Times New Roman" panose="02020603050405020304" pitchFamily="18" charset="0"/>
+              </a:rPr>
+              <a:t> </a:t>
+            </a:r>
+            <a:r>
+              <a:rPr lang="en-US" sz="1900" b="1" dirty="0" err="1">
+                <a:latin typeface="Times New Roman" panose="02020603050405020304" pitchFamily="18" charset="0"/>
+                <a:cs typeface="Times New Roman" panose="02020603050405020304" pitchFamily="18" charset="0"/>
+              </a:rPr>
+              <a:t>diring</a:t>
+            </a:r>
+            <a:r>
+              <a:rPr lang="en-US" sz="1900" b="1" dirty="0">
+                <a:latin typeface="Times New Roman" panose="02020603050405020304" pitchFamily="18" charset="0"/>
+                <a:cs typeface="Times New Roman" panose="02020603050405020304" pitchFamily="18" charset="0"/>
+              </a:rPr>
+              <a:t> these weather changes</a:t>
+            </a:r>
+          </a:p>
+          <a:p>
+            <a:r>
+              <a:rPr lang="en-US" sz="1900" b="1" dirty="0">
+                <a:latin typeface="Times New Roman" panose="02020603050405020304" pitchFamily="18" charset="0"/>
+                <a:cs typeface="Times New Roman" panose="02020603050405020304" pitchFamily="18" charset="0"/>
+              </a:rPr>
+              <a:t>4. The city should integrate an emergency dispatch system. This is because we a 69% recall, which flags when a crash is likely to have an injury</a:t>
+            </a:r>
+            <a:r>
+              <a:rPr lang="en-US" b="1" dirty="0"/>
+              <a:t>. </a:t>
+            </a:r>
+            <a:endParaRPr b="1" dirty="0"/>
           </a:p>
         </p:txBody>
       </p:sp>
@@ -6538,6 +6680,98 @@
       </p:grpSpPr>
       <p:sp>
         <p:nvSpPr>
+          <p:cNvPr id="2" name="Title 1"/>
+          <p:cNvSpPr>
+            <a:spLocks noGrp="1"/>
+          </p:cNvSpPr>
+          <p:nvPr>
+            <p:ph type="title"/>
+          </p:nvPr>
+        </p:nvSpPr>
+        <p:spPr/>
+        <p:txBody>
+          <a:bodyPr/>
+          <a:lstStyle/>
+          <a:p>
+            <a:r>
+              <a:rPr b="1" dirty="0">
+                <a:latin typeface="Times New Roman" panose="02020603050405020304" pitchFamily="18" charset="0"/>
+                <a:cs typeface="Times New Roman" panose="02020603050405020304" pitchFamily="18" charset="0"/>
+              </a:rPr>
+              <a:t>Conclusion</a:t>
+            </a:r>
+          </a:p>
+        </p:txBody>
+      </p:sp>
+      <p:sp>
+        <p:nvSpPr>
+          <p:cNvPr id="3" name="Content Placeholder 2"/>
+          <p:cNvSpPr>
+            <a:spLocks noGrp="1"/>
+          </p:cNvSpPr>
+          <p:nvPr>
+            <p:ph idx="1"/>
+          </p:nvPr>
+        </p:nvSpPr>
+        <p:spPr/>
+        <p:txBody>
+          <a:bodyPr/>
+          <a:lstStyle/>
+          <a:p>
+            <a:r>
+              <a:rPr lang="en-US" b="1" dirty="0"/>
+              <a:t>While a standard model prioritizes on accuracy, we optimized for recall. The model reveals that the more the cars at in intersections the higher the impact of accidents. The city </a:t>
+            </a:r>
+            <a:r>
+              <a:rPr lang="en-US" b="1" dirty="0">
+                <a:latin typeface="Times New Roman" panose="02020603050405020304" pitchFamily="18" charset="0"/>
+                <a:cs typeface="Times New Roman" panose="02020603050405020304" pitchFamily="18" charset="0"/>
+              </a:rPr>
+              <a:t>should</a:t>
+            </a:r>
+            <a:r>
+              <a:rPr lang="en-US" b="1" dirty="0"/>
+              <a:t> focus on multi vehicle intersections within the high risk </a:t>
+            </a:r>
+            <a:r>
+              <a:rPr lang="en-US" b="1" dirty="0" err="1"/>
+              <a:t>lattitude</a:t>
+            </a:r>
+            <a:r>
+              <a:rPr lang="en-US" b="1" dirty="0"/>
+              <a:t> and the allocate resources where they will have immediate impact on saving lives.</a:t>
+            </a:r>
+            <a:endParaRPr b="1" dirty="0"/>
+          </a:p>
+        </p:txBody>
+      </p:sp>
+    </p:spTree>
+  </p:cSld>
+  <p:clrMapOvr>
+    <a:masterClrMapping/>
+  </p:clrMapOvr>
+</p:sld>
+</file>
+
+<file path=ppt/slides/slide15.xml><?xml version="1.0" encoding="utf-8"?>
+<p:sld xmlns:a="http://schemas.openxmlformats.org/drawingml/2006/main" xmlns:r="http://schemas.openxmlformats.org/officeDocument/2006/relationships" xmlns:p="http://schemas.openxmlformats.org/presentationml/2006/main">
+  <p:cSld>
+    <p:spTree>
+      <p:nvGrpSpPr>
+        <p:cNvPr id="1" name=""/>
+        <p:cNvGrpSpPr/>
+        <p:nvPr/>
+      </p:nvGrpSpPr>
+      <p:grpSpPr>
+        <a:xfrm>
+          <a:off x="0" y="0"/>
+          <a:ext cx="0" cy="0"/>
+          <a:chOff x="0" y="0"/>
+          <a:chExt cx="0" cy="0"/>
+        </a:xfrm>
+      </p:grpSpPr>
+      <p:sp>
+        <p:nvSpPr>
           <p:cNvPr id="2" name="Title 1">
             <a:extLst>
               <a:ext uri="{FF2B5EF4-FFF2-40B4-BE49-F238E27FC236}">
@@ -6589,37 +6823,37 @@
           <a:lstStyle/>
           <a:p>
             <a:r>
-              <a:rPr lang="en-US" dirty="0"/>
+              <a:rPr lang="en-US" b="1" dirty="0"/>
               <a:t>1.  Business Understanding</a:t>
             </a:r>
           </a:p>
           <a:p>
             <a:r>
-              <a:rPr lang="en-US" dirty="0"/>
+              <a:rPr lang="en-US" b="1" dirty="0"/>
               <a:t>2.  Data Understanding</a:t>
             </a:r>
           </a:p>
           <a:p>
             <a:r>
-              <a:rPr lang="en-US" dirty="0"/>
+              <a:rPr lang="en-US" b="1" dirty="0"/>
               <a:t>3.  Data Preparation</a:t>
             </a:r>
           </a:p>
           <a:p>
             <a:r>
-              <a:rPr lang="en-US" dirty="0"/>
+              <a:rPr lang="en-US" b="1" dirty="0"/>
               <a:t>4.  Modeling</a:t>
             </a:r>
           </a:p>
           <a:p>
             <a:r>
-              <a:rPr lang="en-US" dirty="0"/>
+              <a:rPr lang="en-US" b="1" dirty="0"/>
               <a:t>5.  Evaluation</a:t>
             </a:r>
           </a:p>
           <a:p>
             <a:r>
-              <a:rPr lang="en-US" dirty="0"/>
+              <a:rPr lang="en-US" b="1" dirty="0"/>
               <a:t>6.  Conclusion and Recommendations</a:t>
             </a:r>
           </a:p>
@@ -6658,60 +6892,42 @@
           <a:chExt cx="0" cy="0"/>
         </a:xfrm>
       </p:grpSpPr>
-      <p:sp>
-        <p:nvSpPr>
-          <p:cNvPr id="2" name="Title 1"/>
-          <p:cNvSpPr>
-            <a:spLocks noGrp="1"/>
-          </p:cNvSpPr>
-          <p:nvPr>
-            <p:ph type="title"/>
-          </p:nvPr>
-        </p:nvSpPr>
-        <p:spPr/>
-        <p:txBody>
-          <a:bodyPr/>
-          <a:lstStyle/>
-          <a:p>
-            <a:r>
-              <a:t>Business Problem</a:t>
-            </a:r>
-          </a:p>
-        </p:txBody>
-      </p:sp>
-      <p:sp>
-        <p:nvSpPr>
-          <p:cNvPr id="3" name="Content Placeholder 2"/>
-          <p:cNvSpPr>
-            <a:spLocks noGrp="1"/>
-          </p:cNvSpPr>
-          <p:nvPr>
-            <p:ph idx="1"/>
-          </p:nvPr>
-        </p:nvSpPr>
-        <p:spPr/>
-        <p:txBody>
-          <a:bodyPr/>
-          <a:lstStyle/>
-          <a:p>
-            <a:r>
-              <a:rPr lang="en-US" dirty="0"/>
-              <a:t>Traffic accidents are a major concern in Chicago. Understanding the conditions that lead to severe crashes will help the Vehicle safety board.</a:t>
-            </a:r>
-          </a:p>
-          <a:p>
-            <a:r>
-              <a:rPr lang="en-US" dirty="0"/>
-              <a:t>This project aims to build a classification model that predicts whether a car crash will result in injuries based on environmental factors or other factors. The insights from this model will help identify high risk conditions and implement preventive measures to improve road safety.</a:t>
-            </a:r>
-            <a:br>
-              <a:rPr lang="en-US" dirty="0"/>
-            </a:br>
-            <a:endParaRPr lang="en-US" dirty="0"/>
-          </a:p>
-        </p:txBody>
-      </p:sp>
+      <p:pic>
+        <p:nvPicPr>
+          <p:cNvPr id="6" name="Picture Placeholder 5">
+            <a:extLst>
+              <a:ext uri="{FF2B5EF4-FFF2-40B4-BE49-F238E27FC236}">
+                <a16:creationId xmlns:a16="http://schemas.microsoft.com/office/drawing/2014/main" id="{7C047B96-9825-345C-EDA7-E40D5BD393CA}"/>
+              </a:ext>
+            </a:extLst>
+          </p:cNvPr>
+          <p:cNvPicPr>
+            <a:picLocks noGrp="1" noChangeAspect="1"/>
+          </p:cNvPicPr>
+          <p:nvPr>
+            <p:ph type="pic" idx="1"/>
+          </p:nvPr>
+        </p:nvPicPr>
+        <p:blipFill>
+          <a:blip r:embed="rId2"/>
+          <a:srcRect t="4576" b="4576"/>
+          <a:stretch>
+            <a:fillRect/>
+          </a:stretch>
+        </p:blipFill>
+        <p:spPr>
+          <a:xfrm>
+            <a:off x="609599" y="609599"/>
+            <a:ext cx="7600898" cy="5395785"/>
+          </a:xfrm>
+        </p:spPr>
+      </p:pic>
     </p:spTree>
+    <p:extLst>
+      <p:ext uri="{BB962C8B-B14F-4D97-AF65-F5344CB8AC3E}">
+        <p14:creationId xmlns:p14="http://schemas.microsoft.com/office/powerpoint/2010/main" val="2523604555"/>
+      </p:ext>
+    </p:extLst>
   </p:cSld>
   <p:clrMapOvr>
     <a:masterClrMapping/>
@@ -6752,7 +6968,11 @@
           <a:lstStyle/>
           <a:p>
             <a:r>
-              <a:t>Stakeholders</a:t>
+              <a:rPr b="1" dirty="0">
+                <a:latin typeface="Times New Roman" panose="02020603050405020304" pitchFamily="18" charset="0"/>
+                <a:cs typeface="Times New Roman" panose="02020603050405020304" pitchFamily="18" charset="0"/>
+              </a:rPr>
+              <a:t>Business Problem</a:t>
             </a:r>
           </a:p>
         </p:txBody>
@@ -6769,64 +6989,37 @@
         </p:nvSpPr>
         <p:spPr/>
         <p:txBody>
-          <a:bodyPr/>
-          <a:lstStyle/>
-          <a:p>
-            <a:r>
-              <a:rPr dirty="0"/>
-              <a:t>Vehicle Safety Board</a:t>
-            </a:r>
-            <a:endParaRPr lang="en-US" dirty="0"/>
-          </a:p>
-          <a:p>
-            <a:pPr>
-              <a:buFont typeface="Arial" panose="020B0604020202020204" pitchFamily="34" charset="0"/>
-              <a:buChar char="•"/>
-            </a:pPr>
-            <a:r>
-              <a:rPr lang="en-US" dirty="0"/>
-              <a:t>Responsible for road safety</a:t>
-            </a:r>
-          </a:p>
-          <a:p>
-            <a:pPr>
-              <a:buFont typeface="Arial" panose="020B0604020202020204" pitchFamily="34" charset="0"/>
-              <a:buChar char="•"/>
-            </a:pPr>
-            <a:r>
-              <a:rPr lang="en-US" dirty="0"/>
-              <a:t>Implement safety programs</a:t>
-            </a:r>
-          </a:p>
-          <a:p>
-            <a:pPr>
-              <a:buFont typeface="Arial" panose="020B0604020202020204" pitchFamily="34" charset="0"/>
-              <a:buChar char="•"/>
-            </a:pPr>
-            <a:r>
-              <a:rPr lang="en-US" dirty="0"/>
-              <a:t>They will use this model to identify high risk driving </a:t>
-            </a:r>
-          </a:p>
-          <a:p>
-            <a:endParaRPr dirty="0"/>
-          </a:p>
-          <a:p>
-            <a:r>
-              <a:rPr dirty="0"/>
-              <a:t>City of Chicago</a:t>
-            </a:r>
-            <a:endParaRPr lang="en-US" dirty="0"/>
-          </a:p>
-          <a:p>
-            <a:pPr>
-              <a:buFont typeface="Arial" panose="020B0604020202020204" pitchFamily="34" charset="0"/>
-              <a:buChar char="•"/>
-            </a:pPr>
-            <a:r>
-              <a:rPr lang="en-US" dirty="0"/>
-              <a:t>Responsible for transportation infrastructure</a:t>
-            </a:r>
+          <a:bodyPr>
+            <a:normAutofit/>
+          </a:bodyPr>
+          <a:lstStyle/>
+          <a:p>
+            <a:r>
+              <a:rPr lang="en-US" b="1" dirty="0">
+                <a:latin typeface="Times New Roman" panose="02020603050405020304" pitchFamily="18" charset="0"/>
+                <a:cs typeface="Times New Roman" panose="02020603050405020304" pitchFamily="18" charset="0"/>
+              </a:rPr>
+              <a:t>Traffic accidents are a major concern in Chicago. Understanding the conditions that lead to severe crashes will help the Vehicle safety board.</a:t>
+            </a:r>
+          </a:p>
+          <a:p>
+            <a:r>
+              <a:rPr lang="en-US" b="1" dirty="0">
+                <a:latin typeface="Times New Roman" panose="02020603050405020304" pitchFamily="18" charset="0"/>
+                <a:cs typeface="Times New Roman" panose="02020603050405020304" pitchFamily="18" charset="0"/>
+              </a:rPr>
+              <a:t>This project aims to build a classification model that predicts whether a car crash will result in injuries based on environmental factors or other factors. The insights from this model will help identify high risk conditions and implement preventive measures to improve road safety.</a:t>
+            </a:r>
+            <a:br>
+              <a:rPr lang="en-US" b="1" dirty="0">
+                <a:latin typeface="Times New Roman" panose="02020603050405020304" pitchFamily="18" charset="0"/>
+                <a:cs typeface="Times New Roman" panose="02020603050405020304" pitchFamily="18" charset="0"/>
+              </a:rPr>
+            </a:br>
+            <a:endParaRPr lang="en-US" b="1" dirty="0">
+              <a:latin typeface="Times New Roman" panose="02020603050405020304" pitchFamily="18" charset="0"/>
+              <a:cs typeface="Times New Roman" panose="02020603050405020304" pitchFamily="18" charset="0"/>
+            </a:endParaRPr>
           </a:p>
         </p:txBody>
       </p:sp>
@@ -6871,7 +7064,11 @@
           <a:lstStyle/>
           <a:p>
             <a:r>
-              <a:t>Key Questions</a:t>
+              <a:rPr b="1" dirty="0">
+                <a:latin typeface="Times New Roman" panose="02020603050405020304" pitchFamily="18" charset="0"/>
+                <a:cs typeface="Times New Roman" panose="02020603050405020304" pitchFamily="18" charset="0"/>
+              </a:rPr>
+              <a:t>Stakeholders</a:t>
             </a:r>
           </a:p>
         </p:txBody>
@@ -6892,26 +7089,86 @@
           <a:lstStyle/>
           <a:p>
             <a:r>
-              <a:rPr lang="en-US" dirty="0"/>
-              <a:t>What factors contribute to most crashes?</a:t>
-            </a:r>
-          </a:p>
-          <a:p>
-            <a:r>
-              <a:rPr lang="en-US" dirty="0"/>
-              <a:t>Under what conditions are crashes most likely to result in injuries?</a:t>
-            </a:r>
-          </a:p>
-          <a:p>
-            <a:r>
-              <a:rPr lang="en-US" dirty="0"/>
-              <a:t>Can we predict whether a crash will result in injuries based on environmental conditions?</a:t>
-            </a:r>
-          </a:p>
-          <a:p>
-            <a:r>
-              <a:rPr lang="en-US" dirty="0"/>
-              <a:t>Can we predict the primary contributory cause of accidents?</a:t>
+              <a:rPr b="1" dirty="0">
+                <a:latin typeface="Times New Roman" panose="02020603050405020304" pitchFamily="18" charset="0"/>
+                <a:cs typeface="Times New Roman" panose="02020603050405020304" pitchFamily="18" charset="0"/>
+              </a:rPr>
+              <a:t>Vehicle Safety Board</a:t>
+            </a:r>
+            <a:endParaRPr lang="en-US" b="1" dirty="0">
+              <a:latin typeface="Times New Roman" panose="02020603050405020304" pitchFamily="18" charset="0"/>
+              <a:cs typeface="Times New Roman" panose="02020603050405020304" pitchFamily="18" charset="0"/>
+            </a:endParaRPr>
+          </a:p>
+          <a:p>
+            <a:pPr>
+              <a:buFont typeface="Arial" panose="020B0604020202020204" pitchFamily="34" charset="0"/>
+              <a:buChar char="•"/>
+            </a:pPr>
+            <a:r>
+              <a:rPr lang="en-US" b="1" dirty="0">
+                <a:latin typeface="Times New Roman" panose="02020603050405020304" pitchFamily="18" charset="0"/>
+                <a:cs typeface="Times New Roman" panose="02020603050405020304" pitchFamily="18" charset="0"/>
+              </a:rPr>
+              <a:t>Responsible for road safety</a:t>
+            </a:r>
+          </a:p>
+          <a:p>
+            <a:pPr>
+              <a:buFont typeface="Arial" panose="020B0604020202020204" pitchFamily="34" charset="0"/>
+              <a:buChar char="•"/>
+            </a:pPr>
+            <a:r>
+              <a:rPr lang="en-US" b="1" dirty="0">
+                <a:latin typeface="Times New Roman" panose="02020603050405020304" pitchFamily="18" charset="0"/>
+                <a:cs typeface="Times New Roman" panose="02020603050405020304" pitchFamily="18" charset="0"/>
+              </a:rPr>
+              <a:t>Implement safety programs</a:t>
+            </a:r>
+          </a:p>
+          <a:p>
+            <a:pPr>
+              <a:buFont typeface="Arial" panose="020B0604020202020204" pitchFamily="34" charset="0"/>
+              <a:buChar char="•"/>
+            </a:pPr>
+            <a:r>
+              <a:rPr lang="en-US" b="1" dirty="0">
+                <a:latin typeface="Times New Roman" panose="02020603050405020304" pitchFamily="18" charset="0"/>
+                <a:cs typeface="Times New Roman" panose="02020603050405020304" pitchFamily="18" charset="0"/>
+              </a:rPr>
+              <a:t>They will use this model to identify high risk driving </a:t>
+            </a:r>
+          </a:p>
+          <a:p>
+            <a:endParaRPr b="1" dirty="0">
+              <a:latin typeface="Times New Roman" panose="02020603050405020304" pitchFamily="18" charset="0"/>
+              <a:cs typeface="Times New Roman" panose="02020603050405020304" pitchFamily="18" charset="0"/>
+            </a:endParaRPr>
+          </a:p>
+          <a:p>
+            <a:r>
+              <a:rPr b="1" dirty="0">
+                <a:latin typeface="Times New Roman" panose="02020603050405020304" pitchFamily="18" charset="0"/>
+                <a:cs typeface="Times New Roman" panose="02020603050405020304" pitchFamily="18" charset="0"/>
+              </a:rPr>
+              <a:t>City of Chicago</a:t>
+            </a:r>
+            <a:endParaRPr lang="en-US" b="1" dirty="0">
+              <a:latin typeface="Times New Roman" panose="02020603050405020304" pitchFamily="18" charset="0"/>
+              <a:cs typeface="Times New Roman" panose="02020603050405020304" pitchFamily="18" charset="0"/>
+            </a:endParaRPr>
+          </a:p>
+          <a:p>
+            <a:pPr>
+              <a:buFont typeface="Arial" panose="020B0604020202020204" pitchFamily="34" charset="0"/>
+              <a:buChar char="•"/>
+            </a:pPr>
+            <a:r>
+              <a:rPr lang="en-US" b="1" dirty="0">
+                <a:latin typeface="Times New Roman" panose="02020603050405020304" pitchFamily="18" charset="0"/>
+                <a:cs typeface="Times New Roman" panose="02020603050405020304" pitchFamily="18" charset="0"/>
+              </a:rPr>
+              <a:t>Responsible for transportation infrastructure</a:t>
             </a:r>
           </a:p>
         </p:txBody>
@@ -6957,7 +7214,11 @@
           <a:lstStyle/>
           <a:p>
             <a:r>
-              <a:t>Data Understanding</a:t>
+              <a:rPr b="1" dirty="0">
+                <a:latin typeface="Times New Roman" panose="02020603050405020304" pitchFamily="18" charset="0"/>
+                <a:cs typeface="Times New Roman" panose="02020603050405020304" pitchFamily="18" charset="0"/>
+              </a:rPr>
+              <a:t>Key Questions</a:t>
             </a:r>
           </a:p>
         </p:txBody>
@@ -6978,32 +7239,38 @@
           <a:lstStyle/>
           <a:p>
             <a:r>
-              <a:rPr lang="en-US" dirty="0"/>
-              <a:t>The dataset we are using has been obtained from </a:t>
-            </a:r>
-            <a:r>
-              <a:rPr lang="en-US" dirty="0" err="1"/>
-              <a:t>kaggle</a:t>
-            </a:r>
-            <a:r>
-              <a:rPr lang="en-US" dirty="0"/>
-              <a:t>, it contains car crashes in </a:t>
-            </a:r>
-            <a:r>
-              <a:rPr lang="en-US" dirty="0" err="1"/>
-              <a:t>chicago</a:t>
-            </a:r>
-            <a:r>
-              <a:rPr lang="en-US" dirty="0"/>
-              <a:t> from 2019 to 2022. Its </a:t>
-            </a:r>
-            <a:r>
-              <a:rPr lang="en-US" dirty="0" err="1"/>
-              <a:t>particulary</a:t>
-            </a:r>
-            <a:r>
-              <a:rPr lang="en-US" dirty="0"/>
-              <a:t> useful because it includes car crash variables and environmental factors that influence crash outcomes. It allows us to analyze patterns in traffic accidents.</a:t>
+              <a:rPr lang="en-US" b="1" dirty="0">
+                <a:latin typeface="Times New Roman" panose="02020603050405020304" pitchFamily="18" charset="0"/>
+                <a:cs typeface="Times New Roman" panose="02020603050405020304" pitchFamily="18" charset="0"/>
+              </a:rPr>
+              <a:t>What factors contribute to most crashes?</a:t>
+            </a:r>
+          </a:p>
+          <a:p>
+            <a:r>
+              <a:rPr lang="en-US" b="1" dirty="0">
+                <a:latin typeface="Times New Roman" panose="02020603050405020304" pitchFamily="18" charset="0"/>
+                <a:cs typeface="Times New Roman" panose="02020603050405020304" pitchFamily="18" charset="0"/>
+              </a:rPr>
+              <a:t>Under what conditions are crashes most likely to result in injuries?</a:t>
+            </a:r>
+          </a:p>
+          <a:p>
+            <a:r>
+              <a:rPr lang="en-US" b="1" dirty="0">
+                <a:latin typeface="Times New Roman" panose="02020603050405020304" pitchFamily="18" charset="0"/>
+                <a:cs typeface="Times New Roman" panose="02020603050405020304" pitchFamily="18" charset="0"/>
+              </a:rPr>
+              <a:t>Can we predict whether a crash will result in injuries based on environmental conditions?</a:t>
+            </a:r>
+          </a:p>
+          <a:p>
+            <a:r>
+              <a:rPr lang="en-US" b="1" dirty="0">
+                <a:latin typeface="Times New Roman" panose="02020603050405020304" pitchFamily="18" charset="0"/>
+                <a:cs typeface="Times New Roman" panose="02020603050405020304" pitchFamily="18" charset="0"/>
+              </a:rPr>
+              <a:t>Can we predict the primary contributory cause of accidents?</a:t>
             </a:r>
           </a:p>
         </p:txBody>
@@ -7049,7 +7316,11 @@
           <a:lstStyle/>
           <a:p>
             <a:r>
-              <a:t>Data Preparation</a:t>
+              <a:rPr b="1" dirty="0">
+                <a:latin typeface="Times New Roman" panose="02020603050405020304" pitchFamily="18" charset="0"/>
+                <a:cs typeface="Times New Roman" panose="02020603050405020304" pitchFamily="18" charset="0"/>
+              </a:rPr>
+              <a:t>Data Understanding</a:t>
             </a:r>
           </a:p>
         </p:txBody>
@@ -7066,93 +7337,58 @@
         </p:nvSpPr>
         <p:spPr/>
         <p:txBody>
-          <a:bodyPr>
-            <a:normAutofit fontScale="92500" lnSpcReduction="20000"/>
-          </a:bodyPr>
-          <a:lstStyle/>
-          <a:p>
-            <a:r>
-              <a:rPr lang="en-US" dirty="0"/>
-              <a:t>Several preprocessing steps were performed before training the models:</a:t>
-            </a:r>
-          </a:p>
-          <a:p>
-            <a:r>
-              <a:rPr lang="en-US" dirty="0"/>
-              <a:t>Cleaning missing values</a:t>
-            </a:r>
-          </a:p>
-          <a:p>
-            <a:r>
-              <a:rPr lang="en-US" dirty="0"/>
-              <a:t>Mapping injury values to numeric format</a:t>
-            </a:r>
-          </a:p>
-          <a:p>
-            <a:r>
-              <a:rPr lang="en-US" dirty="0"/>
-              <a:t>Creating a binary target variable (`</a:t>
-            </a:r>
-            <a:r>
-              <a:rPr lang="en-US" dirty="0" err="1"/>
-              <a:t>crash_severity_class</a:t>
-            </a:r>
-            <a:r>
-              <a:rPr lang="en-US" dirty="0"/>
-              <a:t>`)</a:t>
-            </a:r>
-          </a:p>
-          <a:p>
-            <a:r>
-              <a:rPr lang="en-US" dirty="0"/>
-              <a:t> Feature engineering from crash dates</a:t>
-            </a:r>
-          </a:p>
-          <a:p>
-            <a:r>
-              <a:rPr lang="en-US" dirty="0"/>
-              <a:t>One-hot encoding categorical variables</a:t>
-            </a:r>
-          </a:p>
-          <a:p>
-            <a:r>
-              <a:rPr lang="en-US" dirty="0"/>
-              <a:t>Selecting relevant model features</a:t>
-            </a:r>
-          </a:p>
-          <a:p>
-            <a:r>
-              <a:rPr lang="en-US" dirty="0"/>
-              <a:t>Standardizing numerical variables using </a:t>
-            </a:r>
-            <a:r>
-              <a:rPr lang="en-US" dirty="0" err="1"/>
-              <a:t>StandardScaler</a:t>
-            </a:r>
-            <a:endParaRPr lang="en-US" dirty="0"/>
-          </a:p>
-          <a:p>
-            <a:pPr marL="0" indent="0">
-              <a:buNone/>
-            </a:pPr>
-            <a:endParaRPr lang="en-US" dirty="0"/>
-          </a:p>
-          <a:p>
-            <a:r>
-              <a:rPr lang="en-US" dirty="0"/>
-              <a:t>Target Variable:`</a:t>
-            </a:r>
-            <a:r>
-              <a:rPr lang="en-US" dirty="0" err="1"/>
-              <a:t>crash_severity_class</a:t>
-            </a:r>
-            <a:r>
-              <a:rPr lang="en-US" dirty="0"/>
-              <a:t>` - 1 = crash resulted in injuries - 0 = crash resulted in no injuries</a:t>
-            </a:r>
-          </a:p>
-          <a:p>
-            <a:endParaRPr dirty="0"/>
+          <a:bodyPr/>
+          <a:lstStyle/>
+          <a:p>
+            <a:r>
+              <a:rPr lang="en-US" b="1" dirty="0">
+                <a:latin typeface="Times New Roman" panose="02020603050405020304" pitchFamily="18" charset="0"/>
+                <a:cs typeface="Times New Roman" panose="02020603050405020304" pitchFamily="18" charset="0"/>
+              </a:rPr>
+              <a:t>The dataset we are using has been obtained from </a:t>
+            </a:r>
+            <a:r>
+              <a:rPr lang="en-US" b="1" dirty="0" err="1">
+                <a:latin typeface="Times New Roman" panose="02020603050405020304" pitchFamily="18" charset="0"/>
+                <a:cs typeface="Times New Roman" panose="02020603050405020304" pitchFamily="18" charset="0"/>
+              </a:rPr>
+              <a:t>kaggle</a:t>
+            </a:r>
+            <a:r>
+              <a:rPr lang="en-US" b="1" dirty="0">
+                <a:latin typeface="Times New Roman" panose="02020603050405020304" pitchFamily="18" charset="0"/>
+                <a:cs typeface="Times New Roman" panose="02020603050405020304" pitchFamily="18" charset="0"/>
+              </a:rPr>
+              <a:t>, it contains car crashes in </a:t>
+            </a:r>
+            <a:r>
+              <a:rPr lang="en-US" b="1" dirty="0" err="1">
+                <a:latin typeface="Times New Roman" panose="02020603050405020304" pitchFamily="18" charset="0"/>
+                <a:cs typeface="Times New Roman" panose="02020603050405020304" pitchFamily="18" charset="0"/>
+              </a:rPr>
+              <a:t>chicago</a:t>
+            </a:r>
+            <a:r>
+              <a:rPr lang="en-US" b="1" dirty="0">
+                <a:latin typeface="Times New Roman" panose="02020603050405020304" pitchFamily="18" charset="0"/>
+                <a:cs typeface="Times New Roman" panose="02020603050405020304" pitchFamily="18" charset="0"/>
+              </a:rPr>
+              <a:t> from 2019 to 2022. Its </a:t>
+            </a:r>
+            <a:r>
+              <a:rPr lang="en-US" b="1" dirty="0" err="1">
+                <a:latin typeface="Times New Roman" panose="02020603050405020304" pitchFamily="18" charset="0"/>
+                <a:cs typeface="Times New Roman" panose="02020603050405020304" pitchFamily="18" charset="0"/>
+              </a:rPr>
+              <a:t>particulary</a:t>
+            </a:r>
+            <a:r>
+              <a:rPr lang="en-US" b="1" dirty="0">
+                <a:latin typeface="Times New Roman" panose="02020603050405020304" pitchFamily="18" charset="0"/>
+                <a:cs typeface="Times New Roman" panose="02020603050405020304" pitchFamily="18" charset="0"/>
+              </a:rPr>
+              <a:t> useful because it includes car crash variables and environmental factors that influence crash outcomes. It allows us to analyze patterns in traffic accidents.</a:t>
+            </a:r>
           </a:p>
         </p:txBody>
       </p:sp>
@@ -7197,7 +7433,11 @@
           <a:lstStyle/>
           <a:p>
             <a:r>
-              <a:t>Feature Engineering</a:t>
+              <a:rPr b="1" dirty="0">
+                <a:latin typeface="Times New Roman" panose="02020603050405020304" pitchFamily="18" charset="0"/>
+                <a:cs typeface="Times New Roman" panose="02020603050405020304" pitchFamily="18" charset="0"/>
+              </a:rPr>
+              <a:t>Data Preparation</a:t>
             </a:r>
           </a:p>
         </p:txBody>
@@ -7215,86 +7455,140 @@
         <p:spPr/>
         <p:txBody>
           <a:bodyPr>
-            <a:normAutofit fontScale="85000" lnSpcReduction="20000"/>
+            <a:normAutofit fontScale="92500" lnSpcReduction="20000"/>
           </a:bodyPr>
           <a:lstStyle/>
           <a:p>
             <a:r>
-              <a:rPr lang="en-US" dirty="0"/>
-              <a:t>The following features were selected for modeling:</a:t>
-            </a:r>
-          </a:p>
-          <a:p>
-            <a:r>
-              <a:rPr lang="en-US" dirty="0"/>
-              <a:t>windspeed</a:t>
-            </a:r>
-          </a:p>
-          <a:p>
-            <a:r>
-              <a:rPr lang="en-US" dirty="0" err="1"/>
-              <a:t>winddir</a:t>
-            </a:r>
-            <a:endParaRPr lang="en-US" dirty="0"/>
-          </a:p>
-          <a:p>
-            <a:r>
-              <a:rPr lang="en-US" dirty="0"/>
-              <a:t>pressure</a:t>
-            </a:r>
-          </a:p>
-          <a:p>
-            <a:r>
-              <a:rPr lang="en-US" dirty="0"/>
-              <a:t> visibility</a:t>
-            </a:r>
-          </a:p>
-          <a:p>
-            <a:r>
-              <a:rPr lang="en-US" dirty="0" err="1"/>
-              <a:t>cloudcover</a:t>
-            </a:r>
-            <a:endParaRPr lang="en-US" dirty="0"/>
-          </a:p>
-          <a:p>
-            <a:r>
-              <a:rPr lang="en-US" dirty="0" err="1"/>
-              <a:t>moonphase</a:t>
-            </a:r>
-            <a:endParaRPr lang="en-US" dirty="0"/>
-          </a:p>
-          <a:p>
-            <a:r>
-              <a:rPr lang="en-US" dirty="0" err="1"/>
-              <a:t>lattitude</a:t>
-            </a:r>
-            <a:endParaRPr lang="en-US" dirty="0"/>
-          </a:p>
-          <a:p>
-            <a:r>
-              <a:rPr lang="en-US" dirty="0" err="1"/>
-              <a:t>days_temp</a:t>
-            </a:r>
-            <a:endParaRPr lang="en-US" dirty="0"/>
-          </a:p>
-          <a:p>
-            <a:r>
-              <a:rPr lang="en-US" dirty="0" err="1"/>
-              <a:t>num_vehicles_in_crash</a:t>
-            </a:r>
-            <a:endParaRPr lang="en-US" dirty="0"/>
+              <a:rPr lang="en-US" b="1" dirty="0">
+                <a:latin typeface="Times New Roman" panose="02020603050405020304" pitchFamily="18" charset="0"/>
+                <a:cs typeface="Times New Roman" panose="02020603050405020304" pitchFamily="18" charset="0"/>
+              </a:rPr>
+              <a:t>Several preprocessing steps were performed before training the models:</a:t>
+            </a:r>
+          </a:p>
+          <a:p>
+            <a:r>
+              <a:rPr lang="en-US" b="1" dirty="0">
+                <a:latin typeface="Times New Roman" panose="02020603050405020304" pitchFamily="18" charset="0"/>
+                <a:cs typeface="Times New Roman" panose="02020603050405020304" pitchFamily="18" charset="0"/>
+              </a:rPr>
+              <a:t>Cleaning missing values</a:t>
+            </a:r>
+          </a:p>
+          <a:p>
+            <a:r>
+              <a:rPr lang="en-US" b="1" dirty="0">
+                <a:latin typeface="Times New Roman" panose="02020603050405020304" pitchFamily="18" charset="0"/>
+                <a:cs typeface="Times New Roman" panose="02020603050405020304" pitchFamily="18" charset="0"/>
+              </a:rPr>
+              <a:t>Mapping injury values to numeric format</a:t>
+            </a:r>
+          </a:p>
+          <a:p>
+            <a:r>
+              <a:rPr lang="en-US" b="1" dirty="0">
+                <a:latin typeface="Times New Roman" panose="02020603050405020304" pitchFamily="18" charset="0"/>
+                <a:cs typeface="Times New Roman" panose="02020603050405020304" pitchFamily="18" charset="0"/>
+              </a:rPr>
+              <a:t>Creating a binary target variable (`</a:t>
+            </a:r>
+            <a:r>
+              <a:rPr lang="en-US" b="1" dirty="0" err="1">
+                <a:latin typeface="Times New Roman" panose="02020603050405020304" pitchFamily="18" charset="0"/>
+                <a:cs typeface="Times New Roman" panose="02020603050405020304" pitchFamily="18" charset="0"/>
+              </a:rPr>
+              <a:t>crash_severity_class</a:t>
+            </a:r>
+            <a:r>
+              <a:rPr lang="en-US" b="1" dirty="0">
+                <a:latin typeface="Times New Roman" panose="02020603050405020304" pitchFamily="18" charset="0"/>
+                <a:cs typeface="Times New Roman" panose="02020603050405020304" pitchFamily="18" charset="0"/>
+              </a:rPr>
+              <a:t>`)</a:t>
+            </a:r>
+          </a:p>
+          <a:p>
+            <a:r>
+              <a:rPr lang="en-US" b="1" dirty="0">
+                <a:latin typeface="Times New Roman" panose="02020603050405020304" pitchFamily="18" charset="0"/>
+                <a:cs typeface="Times New Roman" panose="02020603050405020304" pitchFamily="18" charset="0"/>
+              </a:rPr>
+              <a:t> Feature engineering from crash dates</a:t>
+            </a:r>
+          </a:p>
+          <a:p>
+            <a:r>
+              <a:rPr lang="en-US" b="1" dirty="0">
+                <a:latin typeface="Times New Roman" panose="02020603050405020304" pitchFamily="18" charset="0"/>
+                <a:cs typeface="Times New Roman" panose="02020603050405020304" pitchFamily="18" charset="0"/>
+              </a:rPr>
+              <a:t>One-hot encoding categorical variables</a:t>
+            </a:r>
+          </a:p>
+          <a:p>
+            <a:r>
+              <a:rPr lang="en-US" b="1" dirty="0">
+                <a:latin typeface="Times New Roman" panose="02020603050405020304" pitchFamily="18" charset="0"/>
+                <a:cs typeface="Times New Roman" panose="02020603050405020304" pitchFamily="18" charset="0"/>
+              </a:rPr>
+              <a:t>Selecting relevant model features</a:t>
+            </a:r>
+          </a:p>
+          <a:p>
+            <a:r>
+              <a:rPr lang="en-US" b="1" dirty="0">
+                <a:latin typeface="Times New Roman" panose="02020603050405020304" pitchFamily="18" charset="0"/>
+                <a:cs typeface="Times New Roman" panose="02020603050405020304" pitchFamily="18" charset="0"/>
+              </a:rPr>
+              <a:t>Standardizing numerical variables using </a:t>
+            </a:r>
+            <a:r>
+              <a:rPr lang="en-US" b="1" dirty="0" err="1">
+                <a:latin typeface="Times New Roman" panose="02020603050405020304" pitchFamily="18" charset="0"/>
+                <a:cs typeface="Times New Roman" panose="02020603050405020304" pitchFamily="18" charset="0"/>
+              </a:rPr>
+              <a:t>StandardScaler</a:t>
+            </a:r>
+            <a:endParaRPr lang="en-US" b="1" dirty="0">
+              <a:latin typeface="Times New Roman" panose="02020603050405020304" pitchFamily="18" charset="0"/>
+              <a:cs typeface="Times New Roman" panose="02020603050405020304" pitchFamily="18" charset="0"/>
+            </a:endParaRPr>
           </a:p>
           <a:p>
             <a:pPr marL="0" indent="0">
               <a:buNone/>
             </a:pPr>
-            <a:endParaRPr lang="en-US" dirty="0"/>
-          </a:p>
-          <a:p>
-            <a:r>
-              <a:rPr lang="en-US" dirty="0"/>
-              <a:t>These features represent environmental conditions and crash characteristics that may influence injury outcomes.</a:t>
-            </a:r>
+            <a:endParaRPr lang="en-US" b="1" dirty="0">
+              <a:latin typeface="Times New Roman" panose="02020603050405020304" pitchFamily="18" charset="0"/>
+              <a:cs typeface="Times New Roman" panose="02020603050405020304" pitchFamily="18" charset="0"/>
+            </a:endParaRPr>
+          </a:p>
+          <a:p>
+            <a:r>
+              <a:rPr lang="en-US" b="1" dirty="0">
+                <a:latin typeface="Times New Roman" panose="02020603050405020304" pitchFamily="18" charset="0"/>
+                <a:cs typeface="Times New Roman" panose="02020603050405020304" pitchFamily="18" charset="0"/>
+              </a:rPr>
+              <a:t>Target Variable:`</a:t>
+            </a:r>
+            <a:r>
+              <a:rPr lang="en-US" b="1" dirty="0" err="1">
+                <a:latin typeface="Times New Roman" panose="02020603050405020304" pitchFamily="18" charset="0"/>
+                <a:cs typeface="Times New Roman" panose="02020603050405020304" pitchFamily="18" charset="0"/>
+              </a:rPr>
+              <a:t>crash_severity_class</a:t>
+            </a:r>
+            <a:r>
+              <a:rPr lang="en-US" b="1" dirty="0">
+                <a:latin typeface="Times New Roman" panose="02020603050405020304" pitchFamily="18" charset="0"/>
+                <a:cs typeface="Times New Roman" panose="02020603050405020304" pitchFamily="18" charset="0"/>
+              </a:rPr>
+              <a:t>` - 1 = crash resulted in injuries - 0 = crash resulted in no injuries</a:t>
+            </a:r>
+          </a:p>
+          <a:p>
+            <a:endParaRPr dirty="0"/>
           </a:p>
         </p:txBody>
       </p:sp>
@@ -7339,7 +7633,11 @@
           <a:lstStyle/>
           <a:p>
             <a:r>
-              <a:t>Modeling Approach</a:t>
+              <a:rPr b="1" dirty="0">
+                <a:latin typeface="Times New Roman" panose="02020603050405020304" pitchFamily="18" charset="0"/>
+                <a:cs typeface="Times New Roman" panose="02020603050405020304" pitchFamily="18" charset="0"/>
+              </a:rPr>
+              <a:t>Feature Engineering</a:t>
             </a:r>
           </a:p>
         </p:txBody>
@@ -7354,51 +7652,154 @@
             <p:ph idx="1"/>
           </p:nvPr>
         </p:nvSpPr>
-        <p:spPr/>
-        <p:txBody>
-          <a:bodyPr/>
-          <a:lstStyle/>
-          <a:p>
-            <a:r>
-              <a:rPr dirty="0"/>
-              <a:t>Train-test split (80/20)</a:t>
-            </a:r>
-          </a:p>
-          <a:p>
-            <a:r>
-              <a:rPr dirty="0"/>
-              <a:t>Standardization applied</a:t>
-            </a:r>
-            <a:endParaRPr lang="en-US" dirty="0"/>
-          </a:p>
-          <a:p>
-            <a:r>
-              <a:rPr lang="en-US" dirty="0"/>
-              <a:t>Cross-validation</a:t>
-            </a:r>
+        <p:spPr>
+          <a:xfrm>
+            <a:off x="609599" y="2160590"/>
+            <a:ext cx="6347714" cy="5014567"/>
+          </a:xfrm>
+        </p:spPr>
+        <p:txBody>
+          <a:bodyPr>
+            <a:noAutofit/>
+          </a:bodyPr>
+          <a:lstStyle/>
+          <a:p>
+            <a:r>
+              <a:rPr lang="en-US" sz="1400" b="1" dirty="0">
+                <a:latin typeface="Times New Roman" panose="02020603050405020304" pitchFamily="18" charset="0"/>
+                <a:cs typeface="Times New Roman" panose="02020603050405020304" pitchFamily="18" charset="0"/>
+              </a:rPr>
+              <a:t>The following features were selected for modeling:</a:t>
+            </a:r>
+          </a:p>
+          <a:p>
+            <a:r>
+              <a:rPr lang="en-US" sz="1400" b="1" dirty="0">
+                <a:latin typeface="Times New Roman" panose="02020603050405020304" pitchFamily="18" charset="0"/>
+                <a:cs typeface="Times New Roman" panose="02020603050405020304" pitchFamily="18" charset="0"/>
+              </a:rPr>
+              <a:t>windspeed</a:t>
+            </a:r>
+          </a:p>
+          <a:p>
+            <a:r>
+              <a:rPr lang="en-US" sz="1400" b="1" dirty="0" err="1">
+                <a:latin typeface="Times New Roman" panose="02020603050405020304" pitchFamily="18" charset="0"/>
+                <a:cs typeface="Times New Roman" panose="02020603050405020304" pitchFamily="18" charset="0"/>
+              </a:rPr>
+              <a:t>winddir</a:t>
+            </a:r>
+            <a:endParaRPr lang="en-US" sz="1400" b="1" dirty="0">
+              <a:latin typeface="Times New Roman" panose="02020603050405020304" pitchFamily="18" charset="0"/>
+              <a:cs typeface="Times New Roman" panose="02020603050405020304" pitchFamily="18" charset="0"/>
+            </a:endParaRPr>
+          </a:p>
+          <a:p>
+            <a:r>
+              <a:rPr lang="en-US" sz="1400" b="1" dirty="0">
+                <a:latin typeface="Times New Roman" panose="02020603050405020304" pitchFamily="18" charset="0"/>
+                <a:cs typeface="Times New Roman" panose="02020603050405020304" pitchFamily="18" charset="0"/>
+              </a:rPr>
+              <a:t>pressure</a:t>
+            </a:r>
+          </a:p>
+          <a:p>
+            <a:r>
+              <a:rPr lang="en-US" sz="1400" b="1" dirty="0">
+                <a:latin typeface="Times New Roman" panose="02020603050405020304" pitchFamily="18" charset="0"/>
+                <a:cs typeface="Times New Roman" panose="02020603050405020304" pitchFamily="18" charset="0"/>
+              </a:rPr>
+              <a:t> visibility</a:t>
+            </a:r>
+          </a:p>
+          <a:p>
+            <a:r>
+              <a:rPr lang="en-US" sz="1400" b="1" dirty="0" err="1">
+                <a:latin typeface="Times New Roman" panose="02020603050405020304" pitchFamily="18" charset="0"/>
+                <a:cs typeface="Times New Roman" panose="02020603050405020304" pitchFamily="18" charset="0"/>
+              </a:rPr>
+              <a:t>cloudcover</a:t>
+            </a:r>
+            <a:endParaRPr lang="en-US" sz="1400" b="1" dirty="0">
+              <a:latin typeface="Times New Roman" panose="02020603050405020304" pitchFamily="18" charset="0"/>
+              <a:cs typeface="Times New Roman" panose="02020603050405020304" pitchFamily="18" charset="0"/>
+            </a:endParaRPr>
+          </a:p>
+          <a:p>
+            <a:r>
+              <a:rPr lang="en-US" sz="1400" b="1" dirty="0" err="1">
+                <a:latin typeface="Times New Roman" panose="02020603050405020304" pitchFamily="18" charset="0"/>
+                <a:cs typeface="Times New Roman" panose="02020603050405020304" pitchFamily="18" charset="0"/>
+              </a:rPr>
+              <a:t>moonphase</a:t>
+            </a:r>
+            <a:endParaRPr lang="en-US" sz="1400" b="1" dirty="0">
+              <a:latin typeface="Times New Roman" panose="02020603050405020304" pitchFamily="18" charset="0"/>
+              <a:cs typeface="Times New Roman" panose="02020603050405020304" pitchFamily="18" charset="0"/>
+            </a:endParaRPr>
+          </a:p>
+          <a:p>
+            <a:r>
+              <a:rPr lang="en-US" sz="1400" b="1" dirty="0" err="1">
+                <a:latin typeface="Times New Roman" panose="02020603050405020304" pitchFamily="18" charset="0"/>
+                <a:cs typeface="Times New Roman" panose="02020603050405020304" pitchFamily="18" charset="0"/>
+              </a:rPr>
+              <a:t>lattitude</a:t>
+            </a:r>
+            <a:endParaRPr lang="en-US" sz="1400" b="1" dirty="0">
+              <a:latin typeface="Times New Roman" panose="02020603050405020304" pitchFamily="18" charset="0"/>
+              <a:cs typeface="Times New Roman" panose="02020603050405020304" pitchFamily="18" charset="0"/>
+            </a:endParaRPr>
+          </a:p>
+          <a:p>
+            <a:r>
+              <a:rPr lang="en-US" sz="1400" b="1" dirty="0" err="1">
+                <a:latin typeface="Times New Roman" panose="02020603050405020304" pitchFamily="18" charset="0"/>
+                <a:cs typeface="Times New Roman" panose="02020603050405020304" pitchFamily="18" charset="0"/>
+              </a:rPr>
+              <a:t>days_temp</a:t>
+            </a:r>
+            <a:endParaRPr lang="en-US" sz="1400" b="1" dirty="0">
+              <a:latin typeface="Times New Roman" panose="02020603050405020304" pitchFamily="18" charset="0"/>
+              <a:cs typeface="Times New Roman" panose="02020603050405020304" pitchFamily="18" charset="0"/>
+            </a:endParaRPr>
+          </a:p>
+          <a:p>
+            <a:r>
+              <a:rPr lang="en-US" sz="1400" b="1" dirty="0" err="1">
+                <a:latin typeface="Times New Roman" panose="02020603050405020304" pitchFamily="18" charset="0"/>
+                <a:cs typeface="Times New Roman" panose="02020603050405020304" pitchFamily="18" charset="0"/>
+              </a:rPr>
+              <a:t>num_vehicles_in_crash</a:t>
+            </a:r>
+            <a:endParaRPr lang="en-US" sz="1400" b="1" dirty="0">
+              <a:latin typeface="Times New Roman" panose="02020603050405020304" pitchFamily="18" charset="0"/>
+              <a:cs typeface="Times New Roman" panose="02020603050405020304" pitchFamily="18" charset="0"/>
+            </a:endParaRPr>
           </a:p>
           <a:p>
             <a:pPr marL="0" indent="0">
               <a:buNone/>
             </a:pPr>
-            <a:endParaRPr dirty="0"/>
-          </a:p>
-          <a:p>
-            <a:r>
-              <a:rPr dirty="0"/>
-              <a:t>Models:</a:t>
-            </a:r>
-          </a:p>
-          <a:p>
-            <a:r>
-              <a:rPr dirty="0"/>
-              <a:t>- Logistic Regression</a:t>
-            </a:r>
-          </a:p>
-          <a:p>
-            <a:r>
-              <a:rPr dirty="0"/>
-              <a:t>- Decision Tree</a:t>
+            <a:endParaRPr lang="en-US" sz="1400" b="1" dirty="0">
+              <a:latin typeface="Times New Roman" panose="02020603050405020304" pitchFamily="18" charset="0"/>
+              <a:cs typeface="Times New Roman" panose="02020603050405020304" pitchFamily="18" charset="0"/>
+            </a:endParaRPr>
+          </a:p>
+          <a:p>
+            <a:r>
+              <a:rPr lang="en-US" sz="1400" b="1" dirty="0">
+                <a:latin typeface="Times New Roman" panose="02020603050405020304" pitchFamily="18" charset="0"/>
+                <a:cs typeface="Times New Roman" panose="02020603050405020304" pitchFamily="18" charset="0"/>
+              </a:rPr>
+              <a:t>These features represent environmental conditions and crash characteristics that may influence injury outcomes</a:t>
+            </a:r>
+            <a:r>
+              <a:rPr lang="en-US" b="1" dirty="0">
+                <a:latin typeface="Times New Roman" panose="02020603050405020304" pitchFamily="18" charset="0"/>
+                <a:cs typeface="Times New Roman" panose="02020603050405020304" pitchFamily="18" charset="0"/>
+              </a:rPr>
+              <a:t>.</a:t>
             </a:r>
           </a:p>
         </p:txBody>
@@ -7444,7 +7845,11 @@
           <a:lstStyle/>
           <a:p>
             <a:r>
-              <a:t>Evaluation Metrics</a:t>
+              <a:rPr b="1" dirty="0">
+                <a:latin typeface="Times New Roman" panose="02020603050405020304" pitchFamily="18" charset="0"/>
+                <a:cs typeface="Times New Roman" panose="02020603050405020304" pitchFamily="18" charset="0"/>
+              </a:rPr>
+              <a:t>Modeling Approach</a:t>
             </a:r>
           </a:p>
         </p:txBody>
@@ -7465,43 +7870,70 @@
           <a:lstStyle/>
           <a:p>
             <a:r>
-              <a:rPr dirty="0"/>
-              <a:t>Accuracy</a:t>
-            </a:r>
-          </a:p>
-          <a:p>
-            <a:r>
-              <a:rPr dirty="0"/>
-              <a:t>Confusion Matrix</a:t>
-            </a:r>
-          </a:p>
-          <a:p>
-            <a:r>
-              <a:rPr dirty="0"/>
-              <a:t>ROC-AUC</a:t>
-            </a:r>
-          </a:p>
-          <a:p>
-            <a:r>
-              <a:rPr dirty="0"/>
-              <a:t>Classification Report</a:t>
-            </a:r>
-            <a:endParaRPr lang="en-US" dirty="0"/>
-          </a:p>
-          <a:p>
-            <a:endParaRPr lang="en-US" dirty="0"/>
-          </a:p>
-          <a:p>
-            <a:r>
-              <a:rPr lang="en-US" dirty="0"/>
-              <a:t>These metrics help measure how well the models predict injury outcomes.</a:t>
+              <a:rPr b="1" dirty="0">
+                <a:latin typeface="Times New Roman" panose="02020603050405020304" pitchFamily="18" charset="0"/>
+                <a:cs typeface="Times New Roman" panose="02020603050405020304" pitchFamily="18" charset="0"/>
+              </a:rPr>
+              <a:t>Train-test split (80/20)</a:t>
+            </a:r>
+          </a:p>
+          <a:p>
+            <a:r>
+              <a:rPr b="1" dirty="0">
+                <a:latin typeface="Times New Roman" panose="02020603050405020304" pitchFamily="18" charset="0"/>
+                <a:cs typeface="Times New Roman" panose="02020603050405020304" pitchFamily="18" charset="0"/>
+              </a:rPr>
+              <a:t>Standardization applied</a:t>
+            </a:r>
+            <a:endParaRPr lang="en-US" b="1" dirty="0">
+              <a:latin typeface="Times New Roman" panose="02020603050405020304" pitchFamily="18" charset="0"/>
+              <a:cs typeface="Times New Roman" panose="02020603050405020304" pitchFamily="18" charset="0"/>
+            </a:endParaRPr>
+          </a:p>
+          <a:p>
+            <a:r>
+              <a:rPr lang="en-US" b="1" dirty="0">
+                <a:latin typeface="Times New Roman" panose="02020603050405020304" pitchFamily="18" charset="0"/>
+                <a:cs typeface="Times New Roman" panose="02020603050405020304" pitchFamily="18" charset="0"/>
+              </a:rPr>
+              <a:t>Cross-validation</a:t>
             </a:r>
           </a:p>
           <a:p>
             <a:pPr marL="0" indent="0">
               <a:buNone/>
             </a:pPr>
-            <a:endParaRPr lang="en-US" dirty="0"/>
+            <a:endParaRPr b="1" dirty="0">
+              <a:latin typeface="Times New Roman" panose="02020603050405020304" pitchFamily="18" charset="0"/>
+              <a:cs typeface="Times New Roman" panose="02020603050405020304" pitchFamily="18" charset="0"/>
+            </a:endParaRPr>
+          </a:p>
+          <a:p>
+            <a:r>
+              <a:rPr b="1" dirty="0">
+                <a:latin typeface="Times New Roman" panose="02020603050405020304" pitchFamily="18" charset="0"/>
+                <a:cs typeface="Times New Roman" panose="02020603050405020304" pitchFamily="18" charset="0"/>
+              </a:rPr>
+              <a:t>Models:</a:t>
+            </a:r>
+          </a:p>
+          <a:p>
+            <a:r>
+              <a:rPr b="1" dirty="0">
+                <a:latin typeface="Times New Roman" panose="02020603050405020304" pitchFamily="18" charset="0"/>
+                <a:cs typeface="Times New Roman" panose="02020603050405020304" pitchFamily="18" charset="0"/>
+              </a:rPr>
+              <a:t>- Logistic Regression</a:t>
+            </a:r>
+          </a:p>
+          <a:p>
+            <a:r>
+              <a:rPr b="1" dirty="0">
+                <a:latin typeface="Times New Roman" panose="02020603050405020304" pitchFamily="18" charset="0"/>
+                <a:cs typeface="Times New Roman" panose="02020603050405020304" pitchFamily="18" charset="0"/>
+              </a:rPr>
+              <a:t>- Decision Tree</a:t>
+            </a:r>
           </a:p>
         </p:txBody>
       </p:sp>
